--- a/vault/courses/production-agents-claude-agent-sdk-mcp-connector/ch03-slides.pptx
+++ b/vault/courses/production-agents-claude-agent-sdk-mcp-connector/ch03-slides.pptx
@@ -3302,7 +3302,7 @@
                   <a:srgbClr val="FFFFFF"/>
                 </a:solidFill>
               </a:rPr>
-              <a:t>  MCP tools follow the naming pattern mcp____ — e.g., the GitHub server named "github" with a list_issues tool becomes mcp__github__list_issue</a:t>
+              <a:t>  MCP tools follow the naming pattern mcp__server-name__tool-name — e.g., the GitHub server named "github" with...</a:t>
             </a:r>
           </a:p>
         </p:txBody>
@@ -3336,7 +3336,7 @@
                   <a:srgbClr val="FFFFFF"/>
                 </a:solidFill>
               </a:rPr>
-              <a:t>  MCP tools require explicit permission via allowedTools; permissionMode: "acceptEdits" does NOT auto-approve MCP tools [1].</a:t>
+              <a:t>  MCP tools require explicit permission via allowedTools; permissionMode: "acceptEdits" does NOT auto-approve...</a:t>
             </a:r>
           </a:p>
         </p:txBody>
@@ -3370,7 +3370,7 @@
                   <a:srgbClr val="FFFFFF"/>
                 </a:solidFill>
               </a:rPr>
-              <a:t>  Three transport types: stdio (local processes), HTTP (stateless remote), SSE (streaming remote). A fourth option — SDK MCP servers — runs to</a:t>
+              <a:t>  Three transport types: stdio (local processes), HTTP (stateless remote), SSE (streaming remote). A fourth...</a:t>
             </a:r>
           </a:p>
         </p:txBody>
@@ -3404,7 +3404,7 @@
                   <a:srgbClr val="FFFFFF"/>
                 </a:solidFill>
               </a:rPr>
-              <a:t>  The default connection timeout for stdio servers is 60 seconds; servers that take longer to start fail silently unless you check the init sy</a:t>
+              <a:t>  The default connection timeout for stdio servers is 60 seconds; servers that take longer to start fail...</a:t>
             </a:r>
           </a:p>
         </p:txBody>
@@ -3575,7 +3575,7 @@
                   <a:srgbClr val="FFFFFF"/>
                 </a:solidFill>
               </a:rPr>
-              <a:t>  Understanding the naming pattern is the foundation for everything that follows. Given an mcpServers config entry with key "github", every to</a:t>
+              <a:t>  Understanding the naming pattern is the foundation for everything that follows. Given an mcpServers config...</a:t>
             </a:r>
           </a:p>
         </p:txBody>
@@ -3882,7 +3882,7 @@
                   <a:srgbClr val="FFFFFF"/>
                 </a:solidFill>
               </a:rPr>
-              <a:t>  stdio is the most common transport for development and for community-published servers on npm or PyPI. The SDK spawns a child process and co</a:t>
+              <a:t>  stdio is the most common transport for development and for community-published servers on npm or PyPI. The SDK...</a:t>
             </a:r>
           </a:p>
         </p:txBody>
@@ -4121,7 +4121,7 @@
                   <a:srgbClr val="FFFFFF"/>
                 </a:solidFill>
               </a:rPr>
-              <a:t>  This is where the real power emerges. You can configure multiple servers with different transport types in a single mcpServers dict. The age</a:t>
+              <a:t>  This is where the real power emerges. You can configure multiple servers with different transport types in a...</a:t>
             </a:r>
           </a:p>
         </p:txBody>
@@ -4428,7 +4428,7 @@
                   <a:srgbClr val="FFFFFF"/>
                 </a:solidFill>
               </a:rPr>
-              <a:t>  acceptEdits is useful for coding agents that need to read and write files without prompting. But it explicitly does not cover MCP tools. If </a:t>
+              <a:t>  acceptEdits is useful for coding agents that need to read and write files without prompting. But it explicitly...</a:t>
             </a:r>
           </a:p>
         </p:txBody>
